--- a/dist/초1/수학/수와연산/초1_수학_수와연산_11_받아내림이있는뺄셈.pptx
+++ b/dist/초1/수학/수와연산/초1_수학_수와연산_11_받아내림이있는뺄셈.pptx
@@ -119,39 +119,39 @@
   <p:extLst>
     <p:ext uri="{521415D9-36F7-43E2-AB2F-B90AF26B5E84}">
       <p14:sectionLst xmlns:p14="http://schemas.microsoft.com/office/powerpoint/2010/main">
-        <p14:section name="도입" id="{d88a4de5-dbd6-573f-e6cb-d7a194cbfca4}">
+        <p14:section name="도입" id="{85b2685b-0623-8bc5-0eb8-9dc8dc0fb516}">
           <p14:sldIdLst>
             <p14:sldId id="256"/>
             <p14:sldId id="257"/>
           </p14:sldIdLst>
         </p14:section>
-        <p14:section name="개념" id="{ffff556c-8052-e1c6-0d72-c923e5d2803e}">
+        <p14:section name="개념" id="{f1f476cb-a5d0-7610-4520-aef08aca0624}">
           <p14:sldIdLst>
             <p14:sldId id="258"/>
             <p14:sldId id="259"/>
             <p14:sldId id="260"/>
           </p14:sldIdLst>
         </p14:section>
-        <p14:section name="연습" id="{7fb2713a-a36d-e49f-6040-5f487f8530a1}">
+        <p14:section name="연습" id="{0686bc94-75da-f3f1-a8f9-23ef314e1f51}">
           <p14:sldIdLst>
             <p14:sldId id="261"/>
             <p14:sldId id="262"/>
             <p14:sldId id="263"/>
           </p14:sldIdLst>
         </p14:section>
-        <p14:section name="확인" id="{a8ec0847-1177-70dd-f092-ca413793c23a}">
+        <p14:section name="확인" id="{9bbdc7c9-5f36-1553-3528-cd8f437d575c}">
           <p14:sldIdLst>
             <p14:sldId id="264"/>
             <p14:sldId id="265"/>
             <p14:sldId id="266"/>
           </p14:sldIdLst>
         </p14:section>
-        <p14:section name="정리" id="{7953df80-ded8-48de-3f9c-73bb8f85479f}">
+        <p14:section name="정리" id="{efbfda7a-854b-262c-a2fe-797bf10237ef}">
           <p14:sldIdLst>
             <p14:sldId id="267"/>
           </p14:sldIdLst>
         </p14:section>
-        <p14:section name="보충" id="{06538bad-2ad1-b8b0-0191-13b927f05ac9}">
+        <p14:section name="보충" id="{cb04e859-8798-677a-a089-fe61918aaa42}">
           <p14:sldIdLst>
             <p14:sldId id="268"/>
           </p14:sldIdLst>

--- a/dist/초1/수학/수와연산/초1_수학_수와연산_11_받아내림이있는뺄셈.pptx
+++ b/dist/초1/수학/수와연산/초1_수학_수와연산_11_받아내림이있는뺄셈.pptx
@@ -119,39 +119,39 @@
   <p:extLst>
     <p:ext uri="{521415D9-36F7-43E2-AB2F-B90AF26B5E84}">
       <p14:sectionLst xmlns:p14="http://schemas.microsoft.com/office/powerpoint/2010/main">
-        <p14:section name="도입" id="{85b2685b-0623-8bc5-0eb8-9dc8dc0fb516}">
+        <p14:section name="도입" id="{996cd616-b566-4733-efb3-c46c44ecb7a1}">
           <p14:sldIdLst>
             <p14:sldId id="256"/>
             <p14:sldId id="257"/>
           </p14:sldIdLst>
         </p14:section>
-        <p14:section name="개념" id="{f1f476cb-a5d0-7610-4520-aef08aca0624}">
+        <p14:section name="개념" id="{b2df5848-b56e-162a-b7b9-7840d0d4f4b0}">
           <p14:sldIdLst>
             <p14:sldId id="258"/>
             <p14:sldId id="259"/>
             <p14:sldId id="260"/>
           </p14:sldIdLst>
         </p14:section>
-        <p14:section name="연습" id="{0686bc94-75da-f3f1-a8f9-23ef314e1f51}">
+        <p14:section name="연습" id="{97368a30-fc94-bd54-8c7f-c4d9fab4e5fa}">
           <p14:sldIdLst>
             <p14:sldId id="261"/>
             <p14:sldId id="262"/>
             <p14:sldId id="263"/>
           </p14:sldIdLst>
         </p14:section>
-        <p14:section name="확인" id="{9bbdc7c9-5f36-1553-3528-cd8f437d575c}">
+        <p14:section name="확인" id="{3546f829-c628-d93b-81c5-d660b597fbf8}">
           <p14:sldIdLst>
             <p14:sldId id="264"/>
             <p14:sldId id="265"/>
             <p14:sldId id="266"/>
           </p14:sldIdLst>
         </p14:section>
-        <p14:section name="정리" id="{efbfda7a-854b-262c-a2fe-797bf10237ef}">
+        <p14:section name="정리" id="{00fcec64-296b-24db-78ec-078f9dcc0217}">
           <p14:sldIdLst>
             <p14:sldId id="267"/>
           </p14:sldIdLst>
         </p14:section>
-        <p14:section name="보충" id="{cb04e859-8798-677a-a089-fe61918aaa42}">
+        <p14:section name="보충" id="{ff633cdc-4a5d-2c0a-f29c-471a7a23ec3b}">
           <p14:sldIdLst>
             <p14:sldId id="268"/>
           </p14:sldIdLst>
@@ -6449,7 +6449,7 @@
         </p:nvSpPr>
         <p:spPr>
           <a:xfrm>
-            <a:off x="548640" y="3465576"/>
+            <a:off x="548640" y="3488436"/>
             <a:ext cx="566928" cy="566928"/>
           </a:xfrm>
           <a:prstGeom prst="roundRect">
@@ -6496,8 +6496,8 @@
         </p:nvSpPr>
         <p:spPr>
           <a:xfrm flipH="1">
-            <a:off x="2593848" y="3627120"/>
-            <a:ext cx="853440" cy="243840"/>
+            <a:off x="3207258" y="3646170"/>
+            <a:ext cx="880110" cy="251460"/>
           </a:xfrm>
           <a:prstGeom prst="line">
             <a:avLst/>
@@ -6519,8 +6519,8 @@
         </p:nvSpPr>
         <p:spPr>
           <a:xfrm>
-            <a:off x="3447288" y="3627120"/>
-            <a:ext cx="853440" cy="243840"/>
+            <a:off x="4087368" y="3646170"/>
+            <a:ext cx="880110" cy="251460"/>
           </a:xfrm>
           <a:prstGeom prst="line">
             <a:avLst/>
@@ -6542,8 +6542,8 @@
         </p:nvSpPr>
         <p:spPr>
           <a:xfrm>
-            <a:off x="3142488" y="3017520"/>
-            <a:ext cx="609600" cy="609600"/>
+            <a:off x="3773043" y="3017520"/>
+            <a:ext cx="628650" cy="628650"/>
           </a:xfrm>
           <a:prstGeom prst="ellipse">
             <a:avLst/>
@@ -6566,7 +6566,7 @@
               <a:buNone/>
             </a:pPr>
             <a:r>
-              <a:rPr lang="ko-KR" altLang="en-US" sz="2400" b="1" dirty="0">
+              <a:rPr lang="ko-KR" altLang="en-US" sz="2500" b="1" dirty="0">
                 <a:solidFill>
                   <a:srgbClr val="1F2937"/>
                 </a:solidFill>
@@ -6576,7 +6576,7 @@
               </a:rPr>
               <a:t>10</a:t>
             </a:r>
-            <a:endParaRPr lang="ko-KR" sz="2400" dirty="0"/>
+            <a:endParaRPr lang="ko-KR" sz="2500" dirty="0"/>
           </a:p>
         </p:txBody>
       </p:sp>
@@ -6588,8 +6588,8 @@
         </p:nvSpPr>
         <p:spPr>
           <a:xfrm>
-            <a:off x="2289048" y="3870960"/>
-            <a:ext cx="609600" cy="609600"/>
+            <a:off x="2892933" y="3897630"/>
+            <a:ext cx="628650" cy="628650"/>
           </a:xfrm>
           <a:prstGeom prst="ellipse">
             <a:avLst/>
@@ -6612,7 +6612,7 @@
               <a:buNone/>
             </a:pPr>
             <a:r>
-              <a:rPr lang="ko-KR" altLang="en-US" sz="2400" b="1" dirty="0">
+              <a:rPr lang="ko-KR" altLang="en-US" sz="2500" b="1" dirty="0">
                 <a:solidFill>
                   <a:srgbClr val="1F2937"/>
                 </a:solidFill>
@@ -6622,7 +6622,7 @@
               </a:rPr>
               <a:t>4</a:t>
             </a:r>
-            <a:endParaRPr lang="ko-KR" sz="2400" dirty="0"/>
+            <a:endParaRPr lang="ko-KR" sz="2500" dirty="0"/>
           </a:p>
         </p:txBody>
       </p:sp>
@@ -6634,8 +6634,8 @@
         </p:nvSpPr>
         <p:spPr>
           <a:xfrm>
-            <a:off x="3995928" y="3870960"/>
-            <a:ext cx="609600" cy="609600"/>
+            <a:off x="4653153" y="3897630"/>
+            <a:ext cx="628650" cy="628650"/>
           </a:xfrm>
           <a:prstGeom prst="ellipse">
             <a:avLst/>
@@ -6657,7 +6657,7 @@
             <a:pPr eaLnBrk="0" algn="ctr" indent="0" marL="0">
               <a:buNone/>
             </a:pPr>
-            <a:endParaRPr lang="ko-KR" sz="2400" dirty="0"/>
+            <a:endParaRPr lang="ko-KR" sz="2500" dirty="0"/>
           </a:p>
         </p:txBody>
       </p:sp>
@@ -6669,7 +6669,7 @@
         </p:nvSpPr>
         <p:spPr>
           <a:xfrm>
-            <a:off x="548640" y="5157216"/>
+            <a:off x="548640" y="5180076"/>
             <a:ext cx="566928" cy="566928"/>
           </a:xfrm>
           <a:prstGeom prst="roundRect">
@@ -6716,8 +6716,8 @@
         </p:nvSpPr>
         <p:spPr>
           <a:xfrm flipH="1">
-            <a:off x="2593848" y="5318760"/>
-            <a:ext cx="853440" cy="243840"/>
+            <a:off x="3207258" y="5337810"/>
+            <a:ext cx="880110" cy="251460"/>
           </a:xfrm>
           <a:prstGeom prst="line">
             <a:avLst/>
@@ -6739,8 +6739,8 @@
         </p:nvSpPr>
         <p:spPr>
           <a:xfrm>
-            <a:off x="3447288" y="5318760"/>
-            <a:ext cx="853440" cy="243840"/>
+            <a:off x="4087368" y="5337810"/>
+            <a:ext cx="880110" cy="251460"/>
           </a:xfrm>
           <a:prstGeom prst="line">
             <a:avLst/>
@@ -6762,8 +6762,8 @@
         </p:nvSpPr>
         <p:spPr>
           <a:xfrm>
-            <a:off x="3142488" y="4709160"/>
-            <a:ext cx="609600" cy="609600"/>
+            <a:off x="3773043" y="4709160"/>
+            <a:ext cx="628650" cy="628650"/>
           </a:xfrm>
           <a:prstGeom prst="ellipse">
             <a:avLst/>
@@ -6786,7 +6786,7 @@
               <a:buNone/>
             </a:pPr>
             <a:r>
-              <a:rPr lang="ko-KR" altLang="en-US" sz="2400" b="1" dirty="0">
+              <a:rPr lang="ko-KR" altLang="en-US" sz="2500" b="1" dirty="0">
                 <a:solidFill>
                   <a:srgbClr val="1F2937"/>
                 </a:solidFill>
@@ -6796,7 +6796,7 @@
               </a:rPr>
               <a:t>12</a:t>
             </a:r>
-            <a:endParaRPr lang="ko-KR" sz="2400" dirty="0"/>
+            <a:endParaRPr lang="ko-KR" sz="2500" dirty="0"/>
           </a:p>
         </p:txBody>
       </p:sp>
@@ -6808,8 +6808,8 @@
         </p:nvSpPr>
         <p:spPr>
           <a:xfrm>
-            <a:off x="2289048" y="5562600"/>
-            <a:ext cx="609600" cy="609600"/>
+            <a:off x="2892933" y="5589270"/>
+            <a:ext cx="628650" cy="628650"/>
           </a:xfrm>
           <a:prstGeom prst="ellipse">
             <a:avLst/>
@@ -6832,7 +6832,7 @@
               <a:buNone/>
             </a:pPr>
             <a:r>
-              <a:rPr lang="ko-KR" altLang="en-US" sz="2400" b="1" dirty="0">
+              <a:rPr lang="ko-KR" altLang="en-US" sz="2500" b="1" dirty="0">
                 <a:solidFill>
                   <a:srgbClr val="1F2937"/>
                 </a:solidFill>
@@ -6842,7 +6842,7 @@
               </a:rPr>
               <a:t>10</a:t>
             </a:r>
-            <a:endParaRPr lang="ko-KR" sz="2400" dirty="0"/>
+            <a:endParaRPr lang="ko-KR" sz="2500" dirty="0"/>
           </a:p>
         </p:txBody>
       </p:sp>
@@ -6854,8 +6854,8 @@
         </p:nvSpPr>
         <p:spPr>
           <a:xfrm>
-            <a:off x="3995928" y="5562600"/>
-            <a:ext cx="609600" cy="609600"/>
+            <a:off x="4653153" y="5589270"/>
+            <a:ext cx="628650" cy="628650"/>
           </a:xfrm>
           <a:prstGeom prst="ellipse">
             <a:avLst/>
@@ -6877,7 +6877,7 @@
             <a:pPr eaLnBrk="0" algn="ctr" indent="0" marL="0">
               <a:buNone/>
             </a:pPr>
-            <a:endParaRPr lang="ko-KR" sz="2400" dirty="0"/>
+            <a:endParaRPr lang="ko-KR" sz="2500" dirty="0"/>
           </a:p>
         </p:txBody>
       </p:sp>

--- a/dist/초1/수학/수와연산/초1_수학_수와연산_11_받아내림이있는뺄셈.pptx
+++ b/dist/초1/수학/수와연산/초1_수학_수와연산_11_받아내림이있는뺄셈.pptx
@@ -119,39 +119,39 @@
   <p:extLst>
     <p:ext uri="{521415D9-36F7-43E2-AB2F-B90AF26B5E84}">
       <p14:sectionLst xmlns:p14="http://schemas.microsoft.com/office/powerpoint/2010/main">
-        <p14:section name="도입" id="{996cd616-b566-4733-efb3-c46c44ecb7a1}">
+        <p14:section name="도입" id="{7e8b36b7-e8ec-89d7-779c-dc7ae73f472a}">
           <p14:sldIdLst>
             <p14:sldId id="256"/>
             <p14:sldId id="257"/>
           </p14:sldIdLst>
         </p14:section>
-        <p14:section name="개념" id="{b2df5848-b56e-162a-b7b9-7840d0d4f4b0}">
+        <p14:section name="개념" id="{1601f40b-be56-2b40-4a41-19792a5d8b1c}">
           <p14:sldIdLst>
             <p14:sldId id="258"/>
             <p14:sldId id="259"/>
             <p14:sldId id="260"/>
           </p14:sldIdLst>
         </p14:section>
-        <p14:section name="연습" id="{97368a30-fc94-bd54-8c7f-c4d9fab4e5fa}">
+        <p14:section name="연습" id="{8c77a3c9-d7b8-2a0a-aa2c-d9bd42794774}">
           <p14:sldIdLst>
             <p14:sldId id="261"/>
             <p14:sldId id="262"/>
             <p14:sldId id="263"/>
           </p14:sldIdLst>
         </p14:section>
-        <p14:section name="확인" id="{3546f829-c628-d93b-81c5-d660b597fbf8}">
+        <p14:section name="확인" id="{6f31079b-8c38-5fd6-ce59-3e4123e67f0f}">
           <p14:sldIdLst>
             <p14:sldId id="264"/>
             <p14:sldId id="265"/>
             <p14:sldId id="266"/>
           </p14:sldIdLst>
         </p14:section>
-        <p14:section name="정리" id="{00fcec64-296b-24db-78ec-078f9dcc0217}">
+        <p14:section name="정리" id="{aec13eea-e96f-0105-0596-7c3911d046be}">
           <p14:sldIdLst>
             <p14:sldId id="267"/>
           </p14:sldIdLst>
         </p14:section>
-        <p14:section name="보충" id="{ff633cdc-4a5d-2c0a-f29c-471a7a23ec3b}">
+        <p14:section name="보충" id="{38c90acd-18ea-16e1-1025-4211542c6a29}">
           <p14:sldIdLst>
             <p14:sldId id="268"/>
           </p14:sldIdLst>
